--- a/Docs/Призентация.pptx
+++ b/Docs/Призентация.pptx
@@ -15,6 +15,7 @@
     <p:sldId id="263" r:id="rId10"/>
     <p:sldId id="264" r:id="rId11"/>
     <p:sldId id="265" r:id="rId12"/>
+    <p:sldId id="266" r:id="rId13"/>
   </p:sldIdLst>
   <p:sldSz cx="10080625" cy="5670550"/>
   <p:notesSz cx="7559675" cy="10691813"/>
@@ -2304,6 +2305,140 @@
 <file path=ppt/slides/slide10.xml><?xml version="1.0" encoding="utf-8"?>
 <p:sld xmlns:a="http://schemas.openxmlformats.org/drawingml/2006/main" xmlns:p="http://schemas.openxmlformats.org/presentationml/2006/main" xmlns:r="http://schemas.openxmlformats.org/officeDocument/2006/relationships" xmlns:p14="http://schemas.microsoft.com/office/powerpoint/2010/main" xmlns:p15="http://schemas.microsoft.com/office/powerpoint/2012/main" xmlns:mc="http://schemas.openxmlformats.org/markup-compatibility/2006">
   <p:cSld>
+    <p:spTree>
+      <p:nvGrpSpPr>
+        <p:cNvPr id="1" name=""/>
+        <p:cNvGrpSpPr/>
+        <p:nvPr/>
+      </p:nvGrpSpPr>
+      <p:grpSpPr>
+        <a:xfrm>
+          <a:off x="0" y="0"/>
+          <a:ext cx="0" cy="0"/>
+          <a:chOff x="0" y="0"/>
+          <a:chExt cx="0" cy="0"/>
+        </a:xfrm>
+      </p:grpSpPr>
+      <p:sp>
+        <p:nvSpPr>
+          <p:cNvPr id="40" name="PlaceHolder 1"/>
+          <p:cNvSpPr>
+            <a:spLocks noGrp="1"/>
+          </p:cNvSpPr>
+          <p:nvPr>
+            <p:ph type="title"/>
+          </p:nvPr>
+        </p:nvSpPr>
+        <p:spPr>
+          <a:xfrm>
+            <a:off x="540000" y="-720000"/>
+            <a:ext cx="8639280" cy="2517840"/>
+          </a:xfrm>
+          <a:prstGeom prst="rect">
+            <a:avLst/>
+          </a:prstGeom>
+          <a:noFill/>
+          <a:ln w="0">
+            <a:noFill/>
+          </a:ln>
+        </p:spPr>
+        <p:txBody>
+          <a:bodyPr lIns="0" tIns="0" rIns="0" bIns="0" anchor="ctr">
+            <a:spAutoFit/>
+          </a:bodyPr>
+          <a:p>
+            <a:pPr indent="0" algn="l">
+              <a:lnSpc>
+                <a:spcPct val="113000"/>
+              </a:lnSpc>
+              <a:spcBef>
+                <a:spcPts val="11"/>
+              </a:spcBef>
+              <a:spcAft>
+                <a:spcPts val="11"/>
+              </a:spcAft>
+              <a:buNone/>
+              <a:tabLst>
+                <a:tab pos="0" algn="l"/>
+                <a:tab pos="449280" algn="l"/>
+                <a:tab pos="898560" algn="l"/>
+                <a:tab pos="1347840" algn="l"/>
+                <a:tab pos="1797120" algn="l"/>
+                <a:tab pos="2246400" algn="l"/>
+                <a:tab pos="2695680" algn="l"/>
+                <a:tab pos="3144960" algn="l"/>
+                <a:tab pos="3594240" algn="l"/>
+                <a:tab pos="4043520" algn="l"/>
+                <a:tab pos="4492800" algn="l"/>
+                <a:tab pos="4941720" algn="l"/>
+                <a:tab pos="5391000" algn="l"/>
+                <a:tab pos="5840280" algn="l"/>
+                <a:tab pos="6289560" algn="l"/>
+                <a:tab pos="6738840" algn="l"/>
+                <a:tab pos="7188120" algn="l"/>
+                <a:tab pos="7637400" algn="l"/>
+                <a:tab pos="8086680" algn="l"/>
+                <a:tab pos="8535960" algn="l"/>
+                <a:tab pos="8985240" algn="l"/>
+              </a:tabLst>
+            </a:pPr>
+            <a:r>
+              <a:rPr lang="ru-RU" sz="7200" b="1" u="none" strike="noStrike">
+                <a:solidFill>
+                  <a:srgbClr val="FFFFFF"/>
+                </a:solidFill>
+                <a:effectLst/>
+                <a:uFillTx/>
+                <a:latin typeface="Noto Sans"/>
+              </a:rPr>
+              <a:t>Сайт портфолио</a:t>
+            </a:r>
+            <a:endParaRPr lang="ru-RU" sz="7200" b="1" u="none" strike="noStrike">
+              <a:solidFill>
+                <a:srgbClr val="FFFFFF"/>
+              </a:solidFill>
+              <a:effectLst/>
+              <a:uFillTx/>
+              <a:latin typeface="Noto Sans"/>
+            </a:endParaRPr>
+          </a:p>
+        </p:txBody>
+      </p:sp>
+      <p:pic>
+        <p:nvPicPr>
+          <p:cNvPr id="41" name=""/>
+          <p:cNvPicPr/>
+          <p:nvPr/>
+        </p:nvPicPr>
+        <p:blipFill>
+          <a:blip r:embed="rId1"/>
+          <a:stretch/>
+        </p:blipFill>
+        <p:spPr>
+          <a:xfrm>
+            <a:off x="3240000" y="1440000"/>
+            <a:ext cx="3600000" cy="3600000"/>
+          </a:xfrm>
+          <a:prstGeom prst="rect">
+            <a:avLst/>
+          </a:prstGeom>
+          <a:noFill/>
+          <a:ln w="0">
+            <a:noFill/>
+          </a:ln>
+        </p:spPr>
+      </p:pic>
+    </p:spTree>
+  </p:cSld>
+  <p:transition>
+    <p:fade/>
+  </p:transition>
+</p:sld>
+</file>
+
+<file path=ppt/slides/slide11.xml><?xml version="1.0" encoding="utf-8"?>
+<p:sld xmlns:a="http://schemas.openxmlformats.org/drawingml/2006/main" xmlns:p="http://schemas.openxmlformats.org/presentationml/2006/main" xmlns:r="http://schemas.openxmlformats.org/officeDocument/2006/relationships" xmlns:p14="http://schemas.microsoft.com/office/powerpoint/2010/main" xmlns:p15="http://schemas.microsoft.com/office/powerpoint/2012/main" xmlns:mc="http://schemas.openxmlformats.org/markup-compatibility/2006">
+  <p:cSld>
     <p:bg>
       <p:bgPr>
         <a:solidFill>
@@ -2327,7 +2462,7 @@
       </p:grpSpPr>
       <p:sp>
         <p:nvSpPr>
-          <p:cNvPr id="40" name="PlaceHolder 1"/>
+          <p:cNvPr id="42" name="PlaceHolder 1"/>
           <p:cNvSpPr>
             <a:spLocks noGrp="1"/>
           </p:cNvSpPr>
